--- a/apps/resources/bundled_files/5-klass-butun-sandar-koshuu-kemituu-sabak.pptx
+++ b/apps/resources/bundled_files/5-klass-butun-sandar-koshuu-kemituu-sabak.pptx
@@ -5196,7 +5196,7 @@
                 </a:solidFill>
                 <a:latin typeface="PT Sans"/>
               </a:rPr>
-              <a:t>5-класс · Математика</a:t>
+              <a:t/>
             </a:r>
           </a:p>
         </p:txBody>
@@ -5688,7 +5688,7 @@
                 </a:solidFill>
                 <a:latin typeface="PT Sans"/>
               </a:rPr>
-              <a:t>5-класс ›</a:t>
+              <a:t/>
             </a:r>
           </a:p>
           <a:p>
@@ -6637,7 +6637,7 @@
                 </a:solidFill>
                 <a:latin typeface="PT Sans"/>
               </a:rPr>
-              <a:t>5-класс ›</a:t>
+              <a:t/>
             </a:r>
           </a:p>
           <a:p>
@@ -10276,7 +10276,7 @@
                 </a:solidFill>
                 <a:latin typeface="PT Sans"/>
               </a:rPr>
-              <a:t>5-класс ›</a:t>
+              <a:t/>
             </a:r>
           </a:p>
           <a:p>
@@ -13769,7 +13769,7 @@
                 </a:solidFill>
                 <a:latin typeface="PT Sans"/>
               </a:rPr>
-              <a:t>5-класс ›</a:t>
+              <a:t/>
             </a:r>
           </a:p>
           <a:p>
@@ -15352,7 +15352,7 @@
                 </a:solidFill>
                 <a:latin typeface="PT Sans"/>
               </a:rPr>
-              <a:t>5-класс ›</a:t>
+              <a:t/>
             </a:r>
           </a:p>
           <a:p>
@@ -16064,7 +16064,7 @@
                 </a:solidFill>
                 <a:latin typeface="PT Sans"/>
               </a:rPr>
-              <a:t>5-класс ›</a:t>
+              <a:t/>
             </a:r>
           </a:p>
           <a:p>
@@ -16776,7 +16776,7 @@
                 </a:solidFill>
                 <a:latin typeface="PT Sans"/>
               </a:rPr>
-              <a:t>5-класс ›</a:t>
+              <a:t/>
             </a:r>
           </a:p>
           <a:p>
@@ -18403,7 +18403,7 @@
                 </a:solidFill>
                 <a:latin typeface="PT Sans"/>
               </a:rPr>
-              <a:t>5-класс ›</a:t>
+              <a:t/>
             </a:r>
           </a:p>
           <a:p>
@@ -19487,7 +19487,7 @@
                 </a:solidFill>
                 <a:latin typeface="PT Sans"/>
               </a:rPr>
-              <a:t>5-класс ›</a:t>
+              <a:t/>
             </a:r>
           </a:p>
           <a:p>
@@ -21017,7 +21017,7 @@
                 </a:solidFill>
                 <a:latin typeface="PT Sans"/>
               </a:rPr>
-              <a:t>5-класс ›</a:t>
+              <a:t/>
             </a:r>
           </a:p>
           <a:p>
@@ -22688,7 +22688,7 @@
                 </a:solidFill>
                 <a:latin typeface="PT Sans"/>
               </a:rPr>
-              <a:t>5-класс ›</a:t>
+              <a:t/>
             </a:r>
           </a:p>
           <a:p>
@@ -23965,7 +23965,7 @@
                 </a:solidFill>
                 <a:latin typeface="PT Sans"/>
               </a:rPr>
-              <a:t>5-класс ›</a:t>
+              <a:t/>
             </a:r>
           </a:p>
           <a:p>
@@ -25393,7 +25393,7 @@
                 </a:solidFill>
                 <a:latin typeface="PT Sans"/>
               </a:rPr>
-              <a:t>5-класс ›</a:t>
+              <a:t/>
             </a:r>
           </a:p>
           <a:p>
@@ -26849,7 +26849,7 @@
                 </a:solidFill>
                 <a:latin typeface="PT Sans"/>
               </a:rPr>
-              <a:t>5-класс ›</a:t>
+              <a:t/>
             </a:r>
           </a:p>
           <a:p>
@@ -27957,7 +27957,7 @@
                 </a:solidFill>
                 <a:latin typeface="PT Sans"/>
               </a:rPr>
-              <a:t>5-класс ›</a:t>
+              <a:t/>
             </a:r>
           </a:p>
           <a:p>
@@ -28757,7 +28757,7 @@
                 </a:solidFill>
                 <a:latin typeface="PT Sans"/>
               </a:rPr>
-              <a:t>5-класс ›</a:t>
+              <a:t/>
             </a:r>
           </a:p>
           <a:p>
@@ -29598,7 +29598,7 @@
                 </a:solidFill>
                 <a:latin typeface="PT Sans"/>
               </a:rPr>
-              <a:t>5-класс ›</a:t>
+              <a:t/>
             </a:r>
           </a:p>
           <a:p>
@@ -30547,7 +30547,7 @@
                 </a:solidFill>
                 <a:latin typeface="PT Sans"/>
               </a:rPr>
-              <a:t>5-класс ›</a:t>
+              <a:t/>
             </a:r>
           </a:p>
           <a:p>
@@ -32001,7 +32001,7 @@
                 </a:solidFill>
                 <a:latin typeface="PT Sans"/>
               </a:rPr>
-              <a:t>5-класс ›</a:t>
+              <a:t/>
             </a:r>
           </a:p>
           <a:p>
@@ -32747,7 +32747,7 @@
                 </a:solidFill>
                 <a:latin typeface="PT Sans"/>
               </a:rPr>
-              <a:t>5-класс ›</a:t>
+              <a:t/>
             </a:r>
           </a:p>
           <a:p>
@@ -33555,7 +33555,7 @@
                 </a:solidFill>
                 <a:latin typeface="PT Sans"/>
               </a:rPr>
-              <a:t>5-класс ›</a:t>
+              <a:t/>
             </a:r>
           </a:p>
           <a:p>
@@ -34746,7 +34746,7 @@
                 </a:solidFill>
                 <a:latin typeface="PT Sans"/>
               </a:rPr>
-              <a:t>5-класс ›</a:t>
+              <a:t/>
             </a:r>
           </a:p>
           <a:p>
@@ -35925,7 +35925,7 @@
                 </a:solidFill>
                 <a:latin typeface="PT Sans"/>
               </a:rPr>
-              <a:t>5-класс ›</a:t>
+              <a:t/>
             </a:r>
           </a:p>
           <a:p>
@@ -36106,7 +36106,7 @@
                 </a:solidFill>
                 <a:latin typeface="PT Sans"/>
               </a:rPr>
-              <a:t>4-класс</a:t>
+              <a:t/>
             </a:r>
           </a:p>
         </p:txBody>
@@ -36286,7 +36286,7 @@
                 </a:solidFill>
                 <a:latin typeface="PT Sans"/>
               </a:rPr>
-              <a:t>5-класс</a:t>
+              <a:t/>
             </a:r>
           </a:p>
         </p:txBody>
@@ -36522,7 +36522,7 @@
                 </a:solidFill>
                 <a:latin typeface="PT Sans"/>
               </a:rPr>
-              <a:t>6-класс</a:t>
+              <a:t/>
             </a:r>
           </a:p>
         </p:txBody>
@@ -36703,7 +36703,7 @@
                 </a:solidFill>
                 <a:latin typeface="PT Sans"/>
               </a:rPr>
-              <a:t>7-класс</a:t>
+              <a:t/>
             </a:r>
           </a:p>
         </p:txBody>
@@ -37123,7 +37123,7 @@
                 </a:solidFill>
                 <a:latin typeface="PT Sans"/>
               </a:rPr>
-              <a:t>5-класс ›</a:t>
+              <a:t/>
             </a:r>
           </a:p>
           <a:p>
@@ -38271,7 +38271,7 @@
                 </a:solidFill>
                 <a:latin typeface="PT Sans"/>
               </a:rPr>
-              <a:t>5-класс ›</a:t>
+              <a:t/>
             </a:r>
           </a:p>
           <a:p>

--- a/apps/resources/bundled_files/5-klass-butun-sandar-koshuu-kemituu-sabak.pptx
+++ b/apps/resources/bundled_files/5-klass-butun-sandar-koshuu-kemituu-sabak.pptx
@@ -1582,7 +1582,7 @@
           <a:lstStyle/>
           <a:p>
             <a:r>
-              <a:t>Ой жүгүртүү маданияты (Wenxi Lee, 2.6).</a:t>
+              <a:t>Ой жүгүртүү маданияты (Wenxi Lee, 2,6).</a:t>
             </a:r>
           </a:p>
         </p:txBody>
